--- a/exports/03_max_titles.pptx
+++ b/exports/03_max_titles.pptx
@@ -503,7 +503,8 @@
           <a:p>
             <a:r>
               <a:rPr lang="en-US" dirty="0"/>
-              <a:t>Long title test on cover.</a:t>
+              <a:t>Long title test on cover.
+Source: 03_max_titles.pdf</a:t>
             </a:r>
             <a:endParaRPr lang="en-US" dirty="0"/>
           </a:p>
@@ -591,7 +592,8 @@
           <a:p>
             <a:r>
               <a:rPr lang="en-US" dirty="0"/>
-              <a:t>Testing 8-word 65-char max title auto-fit in header.</a:t>
+              <a:t>Testing 8-word 65-char max title auto-fit in header.
+Source: 03_max_titles.pdf</a:t>
             </a:r>
             <a:endParaRPr lang="en-US" dirty="0"/>
           </a:p>
